--- a/slides/1__Expanding_Brackets.pptx
+++ b/slides/1__Expanding_Brackets.pptx
@@ -349,7 +349,7 @@
             <a:pPr indent="0" algn="r">
               <a:buNone/>
             </a:pPr>
-            <a:fld id="{6E542087-1018-4096-B74A-679EAC575284}" type="slidenum">
+            <a:fld id="{2404CC23-28E0-43DD-B4E2-3C23FC7CF185}" type="slidenum">
               <a:rPr b="0" lang="en-US" sz="1400" spc="-1" strike="noStrike">
                 <a:solidFill>
                   <a:srgbClr val="000000"/>
@@ -502,7 +502,7 @@
               </a:lnSpc>
               <a:buNone/>
             </a:pPr>
-            <a:fld id="{09BB2F04-6383-4E18-A72C-EDD7AA55364F}" type="slidenum">
+            <a:fld id="{3201E824-8E2F-4BD7-9D34-2D0C323CE74C}" type="slidenum">
               <a:rPr b="0" lang="en-US" sz="1200" spc="-1" strike="noStrike">
                 <a:solidFill>
                   <a:schemeClr val="dk1"/>
@@ -655,7 +655,7 @@
               </a:lnSpc>
               <a:buNone/>
             </a:pPr>
-            <a:fld id="{F25E6DC4-6524-4806-9FEE-8FF25289B143}" type="slidenum">
+            <a:fld id="{DC3B25D4-CE40-4243-A663-C3F7A5EEAF36}" type="slidenum">
               <a:rPr b="0" lang="en-US" sz="1200" spc="-1" strike="noStrike">
                 <a:solidFill>
                   <a:schemeClr val="dk1"/>
@@ -808,7 +808,7 @@
               </a:lnSpc>
               <a:buNone/>
             </a:pPr>
-            <a:fld id="{79DD7598-9520-4962-AA10-515FB8449090}" type="slidenum">
+            <a:fld id="{47ED5BDC-00F4-435D-A6AF-EBCF17262B59}" type="slidenum">
               <a:rPr b="0" lang="en-US" sz="1200" spc="-1" strike="noStrike">
                 <a:solidFill>
                   <a:schemeClr val="dk1"/>
@@ -961,7 +961,7 @@
               </a:lnSpc>
               <a:buNone/>
             </a:pPr>
-            <a:fld id="{290B8603-8E8D-4016-AD46-0AA2DBE250D6}" type="slidenum">
+            <a:fld id="{4978465E-4C5D-4C8C-A8A0-B5889714EF4A}" type="slidenum">
               <a:rPr b="0" lang="en-US" sz="1200" spc="-1" strike="noStrike">
                 <a:solidFill>
                   <a:schemeClr val="dk1"/>
@@ -1114,7 +1114,7 @@
               </a:lnSpc>
               <a:buNone/>
             </a:pPr>
-            <a:fld id="{4EB105BD-F846-4979-B3F4-BDCBBE7CF2F8}" type="slidenum">
+            <a:fld id="{6B2C809B-914A-4213-8F17-D40B5FB50786}" type="slidenum">
               <a:rPr b="0" lang="en-US" sz="1200" spc="-1" strike="noStrike">
                 <a:solidFill>
                   <a:schemeClr val="dk1"/>
@@ -1267,7 +1267,7 @@
               </a:lnSpc>
               <a:buNone/>
             </a:pPr>
-            <a:fld id="{381EC11D-D2DA-456C-AC3B-DA0A90FEFB4C}" type="slidenum">
+            <a:fld id="{9871C774-5A95-4201-B7BE-AA91BA71E23E}" type="slidenum">
               <a:rPr b="0" lang="en-US" sz="1200" spc="-1" strike="noStrike">
                 <a:solidFill>
                   <a:schemeClr val="dk1"/>
@@ -1420,7 +1420,7 @@
               </a:lnSpc>
               <a:buNone/>
             </a:pPr>
-            <a:fld id="{3E064FCC-401B-4472-9648-0ED11386BCA3}" type="slidenum">
+            <a:fld id="{36B86BA8-B797-4082-9B53-F2E45BAFCB9D}" type="slidenum">
               <a:rPr b="0" lang="en-US" sz="1200" spc="-1" strike="noStrike">
                 <a:solidFill>
                   <a:schemeClr val="dk1"/>
@@ -1573,7 +1573,7 @@
               </a:lnSpc>
               <a:buNone/>
             </a:pPr>
-            <a:fld id="{E4BE9B31-F62C-42A9-8301-77A0EA511B61}" type="slidenum">
+            <a:fld id="{5BD592FD-9F7B-40BC-A33C-B9DEBDD0F165}" type="slidenum">
               <a:rPr b="0" lang="en-US" sz="1200" spc="-1" strike="noStrike">
                 <a:solidFill>
                   <a:schemeClr val="dk1"/>
@@ -1726,7 +1726,7 @@
               </a:lnSpc>
               <a:buNone/>
             </a:pPr>
-            <a:fld id="{4C3E3171-B347-4C62-B464-AAC4606344BE}" type="slidenum">
+            <a:fld id="{C72A42DA-0733-4575-B4E2-9613F4ED49EF}" type="slidenum">
               <a:rPr b="0" lang="en-US" sz="1200" spc="-1" strike="noStrike">
                 <a:solidFill>
                   <a:schemeClr val="dk1"/>
@@ -1879,7 +1879,7 @@
               </a:lnSpc>
               <a:buNone/>
             </a:pPr>
-            <a:fld id="{960265E8-0A9E-481B-BBEE-69EB8C281CAA}" type="slidenum">
+            <a:fld id="{0FFED5EF-A425-4760-BAC6-3F033B116879}" type="slidenum">
               <a:rPr b="0" lang="en-US" sz="1200" spc="-1" strike="noStrike">
                 <a:solidFill>
                   <a:schemeClr val="dk1"/>
@@ -2044,7 +2044,7 @@
               </a:lnSpc>
               <a:buNone/>
             </a:pPr>
-            <a:fld id="{0C094F69-72F7-46DD-BB65-5CA9247DCAFB}" type="slidenum">
+            <a:fld id="{B60F4D0C-7428-419C-B068-7D46E7C5D40B}" type="slidenum">
               <a:rPr b="0" lang="en-US" sz="1200" spc="-1" strike="noStrike">
                 <a:solidFill>
                   <a:schemeClr val="dk1"/>
@@ -2209,7 +2209,7 @@
               </a:lnSpc>
               <a:buNone/>
             </a:pPr>
-            <a:fld id="{9B2FEE15-8DF5-4416-943B-20DFFCC5E320}" type="slidenum">
+            <a:fld id="{EB1C40C7-20F8-4A43-A154-47C470995DD0}" type="slidenum">
               <a:rPr b="0" lang="en-US" sz="1200" spc="-1" strike="noStrike">
                 <a:solidFill>
                   <a:schemeClr val="dk1"/>
